--- a/deliverables/video-6-slides/out/Video_6_Main_Slides.pptx
+++ b/deliverables/video-6-slides/out/Video_6_Main_Slides.pptx
@@ -6038,7 +6038,7 @@
                 <a:ea typeface="Montserrat"/>
                 <a:cs typeface="Montserrat"/>
               </a:rPr>
-              <a:t>HOW TO PROVE THE</a:t>
+              <a:t>HOW TO SHOW YOUR</a:t>
             </a:r>
             <a:br/>
             <a:r>
@@ -6050,7 +6050,7 @@
                 <a:ea typeface="Montserrat"/>
                 <a:cs typeface="Montserrat"/>
               </a:rPr>
-              <a:t>VALUE OF WORK</a:t>
+              <a:t>IMPACT AT WORK</a:t>
             </a:r>
             <a:br/>
             <a:r>
@@ -6062,7 +6062,19 @@
                 <a:ea typeface="Montserrat"/>
                 <a:cs typeface="Montserrat"/>
               </a:rPr>
-              <a:t>THAT HAD NO BLUEPRINT</a:t>
+              <a:t>WHEN YOU BUILT</a:t>
+            </a:r>
+            <a:br/>
+            <a:r>
+              <a:rPr sz="2900" b="1" i="0">
+                <a:solidFill>
+                  <a:srgbClr val="0F2346"/>
+                </a:solidFill>
+                <a:latin typeface="Montserrat"/>
+                <a:ea typeface="Montserrat"/>
+                <a:cs typeface="Montserrat"/>
+              </a:rPr>
+              <a:t>IT FROM SCRATCH</a:t>
             </a:r>
           </a:p>
         </p:txBody>
